--- a/outputs/D.L._digital_ai_transformation.pptx
+++ b/outputs/D.L._digital_ai_transformation.pptx
@@ -3209,8 +3209,8 @@
         </p:nvSpPr>
         <p:spPr>
           <a:xfrm>
-            <a:off x="228600" y="260000"/>
-            <a:ext cx="3842800" cy="800000"/>
+            <a:off x="228600" y="240000"/>
+            <a:ext cx="3842800" cy="1300000"/>
           </a:xfrm>
           <a:prstGeom prst="rect">
             <a:avLst/>
@@ -3225,13 +3225,29 @@
           <a:p>
             <a:pPr algn="l"/>
             <a:r>
-              <a:rPr sz="4800" b="1" i="0">
-                <a:solidFill>
-                  <a:srgbClr val="3AEDE5"/>
-                </a:solidFill>
-                <a:latin typeface="Alegreya Sans"/>
-              </a:rPr>
-              <a:t>D.L.</a:t>
+              <a:rPr sz="2800" b="0" i="0">
+                <a:solidFill>
+                  <a:srgbClr val="3AEDE5"/>
+                </a:solidFill>
+                <a:latin typeface="Alegreya Sans"/>
+              </a:rPr>
+              <a:t>David</a:t>
+            </a:r>
+          </a:p>
+          <a:p>
+            <a:pPr>
+              <a:spcBef>
+                <a:spcPts val="0"/>
+              </a:spcBef>
+            </a:pPr>
+            <a:r>
+              <a:rPr sz="3200" b="1" i="0">
+                <a:solidFill>
+                  <a:srgbClr val="3AEDE5"/>
+                </a:solidFill>
+                <a:latin typeface="Alegreya Sans"/>
+              </a:rPr>
+              <a:t>LECLERCQ</a:t>
             </a:r>
           </a:p>
         </p:txBody>
@@ -3395,7 +3411,7 @@
                 </a:solidFill>
                 <a:latin typeface="Alegreya Sans"/>
               </a:rPr>
-              <a:t>Stratégie et gouvernance IA</a:t>
+              <a:t>Stratégie &amp; gouvernance IA (LLM, RAG, agents)</a:t>
             </a:r>
           </a:p>
           <a:p>
@@ -3445,7 +3461,7 @@
                 </a:solidFill>
                 <a:latin typeface="Alegreya Sans"/>
               </a:rPr>
-              <a:t>Conduite du changement &amp; Agile</a:t>
+              <a:t>Conduite du changement &amp; Agile (Scrum, SAFe)</a:t>
             </a:r>
           </a:p>
           <a:p>
@@ -3752,7 +3768,7 @@
                 </a:solidFill>
                 <a:latin typeface="Alegreya Sans"/>
               </a:rPr>
-              <a:t>Leader expérimenté en transformation IA et digitale, habitué aux environnements complexes et réglementés. Vision stratégique et capacité d'exécution, pilotage de programmes de bout en bout.</a:t>
+              <a:t>Leader expérimenté en transformation IA et digitale, habitué aux environnements complexes et réglementés. Lancement réussi d'une banque en ligne (+33 % vs objectif de collecte) et déploiement de programmes digitaux internationaux.</a:t>
             </a:r>
           </a:p>
           <a:p>
@@ -3839,7 +3855,7 @@
                 </a:solidFill>
                 <a:latin typeface="Alegreya Sans"/>
               </a:rPr>
-              <a:t>Leadership d'équipe Produit pour un acteur de référence de la protection sociale en France (épargne collective, santé, prévoyance) : refonte de l'expérience et des outils de relation client, intégration IA.</a:t>
+              <a:t>Leadership d'équipe Produit pour un acteur majeur de la protection sociale (épargne, santé, prévoyance) : refonte de la relation client, intégration IA.</a:t>
             </a:r>
           </a:p>
           <a:p>
@@ -3932,7 +3948,7 @@
                 </a:solidFill>
                 <a:latin typeface="Alegreya Sans"/>
               </a:rPr>
-              <a:t>Mise en place d'un nouveau modèle de distribution omnicanal et d'un outil SaaS de planification / RDV livraisons de véhicules (4 pays) ; déploiement européen d'une plateforme e-commerce.</a:t>
+              <a:t>Modèle de distribution omnicanal et outil SaaS de planification des livraisons (4 pays) ; déploiement européen d'une plateforme e-commerce.</a:t>
             </a:r>
           </a:p>
           <a:p>
@@ -3957,7 +3973,7 @@
                 </a:solidFill>
                 <a:latin typeface="Alegreya Sans"/>
               </a:rPr>
-              <a:t>Pilotage d'une ligne produit digitale internationale (budget &gt;1M€) : encadrement d'équipes pluridisciplinaires (&gt;50 personnes), définition de la vision produit / roadmap / UX.</a:t>
+              <a:t>Ligne produit digitale internationale (budget &gt;1 M€, équipes &gt;50) ; fusion des leasings Free2Move Lease / Leasys (marketing, digital, assurance).</a:t>
             </a:r>
           </a:p>
           <a:p>
@@ -4025,7 +4041,7 @@
                 </a:solidFill>
                 <a:latin typeface="Alegreya Sans"/>
               </a:rPr>
-              <a:t>Pilotage end-to-end du lancement et développement d'une banque en ligne sur 3 pays ; conception des parcours clients digitaux (acquisition, souscription, KYC, selfcare).</a:t>
+              <a:t>Pilotage end-to-end du lancement d'une banque en ligne sur 3 pays ; parcours clients digitaux (acquisition, souscription, KYC, selfcare).</a:t>
             </a:r>
           </a:p>
           <a:p>
@@ -4143,7 +4159,7 @@
                 </a:solidFill>
                 <a:latin typeface="Alegreya Sans"/>
               </a:rPr>
-              <a:t>Lancement d'interfaces de banque à distance, personnalisation en ligne et applications mobiles innovantes ; encadrement de consultants et développement commercial.</a:t>
+              <a:t>Lancement d'interfaces de banque à distance et d'applications mobiles innovantes ; encadrement de consultants et développement commercial.</a:t>
             </a:r>
           </a:p>
         </p:txBody>
@@ -4365,8 +4381,8 @@
         </p:nvSpPr>
         <p:spPr>
           <a:xfrm>
-            <a:off x="228600" y="260000"/>
-            <a:ext cx="3842800" cy="800000"/>
+            <a:off x="228600" y="240000"/>
+            <a:ext cx="3842800" cy="1300000"/>
           </a:xfrm>
           <a:prstGeom prst="rect">
             <a:avLst/>
@@ -4381,13 +4397,29 @@
           <a:p>
             <a:pPr algn="l"/>
             <a:r>
-              <a:rPr sz="4800" b="1" i="0">
-                <a:solidFill>
-                  <a:srgbClr val="3AEDE5"/>
-                </a:solidFill>
-                <a:latin typeface="Alegreya Sans"/>
-              </a:rPr>
-              <a:t>D.L.</a:t>
+              <a:rPr sz="2800" b="0" i="0">
+                <a:solidFill>
+                  <a:srgbClr val="3AEDE5"/>
+                </a:solidFill>
+                <a:latin typeface="Alegreya Sans"/>
+              </a:rPr>
+              <a:t>David</a:t>
+            </a:r>
+          </a:p>
+          <a:p>
+            <a:pPr>
+              <a:spcBef>
+                <a:spcPts val="0"/>
+              </a:spcBef>
+            </a:pPr>
+            <a:r>
+              <a:rPr sz="3200" b="1" i="0">
+                <a:solidFill>
+                  <a:srgbClr val="3AEDE5"/>
+                </a:solidFill>
+                <a:latin typeface="Alegreya Sans"/>
+              </a:rPr>
+              <a:t>LECLERCQ</a:t>
             </a:r>
           </a:p>
         </p:txBody>
@@ -4551,7 +4583,7 @@
                 </a:solidFill>
                 <a:latin typeface="Alegreya Sans"/>
               </a:rPr>
-              <a:t>AI strategy &amp; governance</a:t>
+              <a:t>AI strategy &amp; governance (LLM, RAG, agents)</a:t>
             </a:r>
           </a:p>
           <a:p>
@@ -4601,7 +4633,7 @@
                 </a:solidFill>
                 <a:latin typeface="Alegreya Sans"/>
               </a:rPr>
-              <a:t>Change management &amp; Agile</a:t>
+              <a:t>Change management &amp; Agile (Scrum, SAFe)</a:t>
             </a:r>
           </a:p>
           <a:p>
@@ -4908,7 +4940,7 @@
                 </a:solidFill>
                 <a:latin typeface="Alegreya Sans"/>
               </a:rPr>
-              <a:t>Experienced leader in AI and digital transformation, familiar with complex and regulated environments. Strategic vision and execution capacity, end-to-end program piloting.</a:t>
+              <a:t>Experienced leader in AI and digital transformation, used to complex regulated environments. Successful online-bank launch (+33% vs deposit target) and delivery of international digital programs.</a:t>
             </a:r>
           </a:p>
           <a:p>
@@ -4995,7 +5027,7 @@
                 </a:solidFill>
                 <a:latin typeface="Alegreya Sans"/>
               </a:rPr>
-              <a:t>Product-team leadership for a leading French social-protection player (group savings, health, protection): overhaul of customer experience and CRM tools, AI integration.</a:t>
+              <a:t>Product-team leadership for a major French social-protection player (savings, health, protection): customer-relations overhaul, AI integration.</a:t>
             </a:r>
           </a:p>
           <a:p>
@@ -5088,7 +5120,7 @@
                 </a:solidFill>
                 <a:latin typeface="Alegreya Sans"/>
               </a:rPr>
-              <a:t>Rollout of a new omnichannel distribution model and a SaaS planning/booking tool for vehicle deliveries (4 countries); European e-commerce platform deployment.</a:t>
+              <a:t>Omnichannel distribution model and SaaS delivery-planning tool (4 countries); European rollout of an e-commerce platform.</a:t>
             </a:r>
           </a:p>
           <a:p>
@@ -5113,7 +5145,7 @@
                 </a:solidFill>
                 <a:latin typeface="Alegreya Sans"/>
               </a:rPr>
-              <a:t>International digital product line management (budget &gt;€1M): leading multidisciplinary teams (&gt;50 people), product vision / roadmap / UX definition.</a:t>
+              <a:t>International digital product line (budget &gt;€1M, teams &gt;50); merger of the Free2Move Lease / Leasys leasing activities (marketing, digital, insurance).</a:t>
             </a:r>
           </a:p>
           <a:p>
@@ -5181,7 +5213,7 @@
                 </a:solidFill>
                 <a:latin typeface="Alegreya Sans"/>
               </a:rPr>
-              <a:t>End-to-end piloting of the launch and growth of an online bank across 3 countries; digital customer journey design (acquisition, onboarding, KYC, selfcare).</a:t>
+              <a:t>End-to-end launch of an online bank across 3 countries; digital customer journeys (acquisition, onboarding, KYC, selfcare).</a:t>
             </a:r>
           </a:p>
           <a:p>

--- a/outputs/D.L._digital_ai_transformation.pptx
+++ b/outputs/D.L._digital_ai_transformation.pptx
@@ -3787,7 +3787,7 @@
                 </a:solidFill>
                 <a:latin typeface="Alegreya Sans"/>
               </a:rPr>
-              <a:t>EXPÉRIENCE PROFESSIONNELLE</a:t>
+              <a:t>PRINCIPALES EXPÉRIENCES PROFESSIONNELLES</a:t>
             </a:r>
           </a:p>
           <a:p>
@@ -4959,7 +4959,7 @@
                 </a:solidFill>
                 <a:latin typeface="Alegreya Sans"/>
               </a:rPr>
-              <a:t>PROFESSIONAL EXPERIENCE</a:t>
+              <a:t>MAIN PROFESSIONAL EXPERIENCE</a:t>
             </a:r>
           </a:p>
           <a:p>
